--- a/docs/03_Operation_Manual_Summary.pptx
+++ b/docs/03_Operation_Manual_Summary.pptx
@@ -3735,7 +3735,7 @@
         </p:nvGraphicFramePr>
         <p:xfrm>
           <a:off x="566928" y="1691640"/>
-          <a:ext cx="11064240" cy="2743200"/>
+          <a:ext cx="11064240" cy="3200400"/>
         </p:xfrm>
         <a:graphic>
           <a:graphicData uri="http://schemas.openxmlformats.org/drawingml/2006/table">
@@ -3828,7 +3828,7 @@
                           </a:solidFill>
                           <a:latin typeface="Segoe UI"/>
                         </a:rPr>
-                        <a:t>github.com/DRC63/method-map (private)</a:t>
+                        <a:t>github.com/DRC63/method-map (+ apps-gateway front door)</a:t>
                       </a:r>
                     </a:p>
                   </a:txBody>
@@ -3874,7 +3874,7 @@
                           </a:solidFill>
                           <a:latin typeface="Segoe UI"/>
                         </a:rPr>
-                        <a:t>Render Docker web service — Starter, Oregon</a:t>
+                        <a:t>Render Docker web services — Starter, Oregon — one per framework</a:t>
                       </a:r>
                     </a:p>
                   </a:txBody>
@@ -3898,7 +3898,7 @@
                           </a:solidFill>
                           <a:latin typeface="Segoe UI"/>
                         </a:rPr>
-                        <a:t>Live URL</a:t>
+                        <a:t>Services</a:t>
                       </a:r>
                     </a:p>
                   </a:txBody>
@@ -3920,7 +3920,7 @@
                           </a:solidFill>
                           <a:latin typeface="Segoe UI"/>
                         </a:rPr>
-                        <a:t>method-map.onrender.com (prince2.p3mai.com pending DNS)</a:t>
+                        <a:t>method-map · msp-method-map · safe-method-map</a:t>
                       </a:r>
                     </a:p>
                   </a:txBody>
@@ -3944,7 +3944,7 @@
                           </a:solidFill>
                           <a:latin typeface="Segoe UI"/>
                         </a:rPr>
-                        <a:t>Database</a:t>
+                        <a:t>Live URLs</a:t>
                       </a:r>
                     </a:p>
                   </a:txBody>
@@ -3966,7 +3966,7 @@
                           </a:solidFill>
                           <a:latin typeface="Segoe UI"/>
                         </a:rPr>
-                        <a:t>SQLite, auto-seeded on boot; ephemeral</a:t>
+                        <a:t>apps.p3mai.com/prince2 · /msp · /safe</a:t>
                       </a:r>
                     </a:p>
                   </a:txBody>
@@ -3990,7 +3990,7 @@
                           </a:solidFill>
                           <a:latin typeface="Segoe UI"/>
                         </a:rPr>
-                        <a:t>Dev ports</a:t>
+                        <a:t>Database</a:t>
                       </a:r>
                     </a:p>
                   </a:txBody>
@@ -4012,13 +4012,59 @@
                           </a:solidFill>
                           <a:latin typeface="Segoe UI"/>
                         </a:rPr>
+                        <a:t>SQLite, auto-seeds its FRAMEWORK_KEY on boot; ephemeral</a:t>
+                      </a:r>
+                    </a:p>
+                  </a:txBody>
+                  <a:tcPr>
+                    <a:solidFill>
+                      <a:srgbClr val="FFFFFF"/>
+                    </a:solidFill>
+                  </a:tcPr>
+                </a:tc>
+              </a:tr>
+              <a:tr h="457200">
+                <a:tc>
+                  <a:txBody>
+                    <a:bodyPr wrap="square"/>
+                    <a:lstStyle/>
+                    <a:p>
+                      <a:r>
+                        <a:rPr sz="1100">
+                          <a:solidFill>
+                            <a:srgbClr val="1C2B3A"/>
+                          </a:solidFill>
+                          <a:latin typeface="Segoe UI"/>
+                        </a:rPr>
+                        <a:t>Dev ports</a:t>
+                      </a:r>
+                    </a:p>
+                  </a:txBody>
+                  <a:tcPr>
+                    <a:solidFill>
+                      <a:srgbClr val="F6F7F9"/>
+                    </a:solidFill>
+                  </a:tcPr>
+                </a:tc>
+                <a:tc>
+                  <a:txBody>
+                    <a:bodyPr wrap="square"/>
+                    <a:lstStyle/>
+                    <a:p>
+                      <a:r>
+                        <a:rPr sz="1100">
+                          <a:solidFill>
+                            <a:srgbClr val="1C2B3A"/>
+                          </a:solidFill>
+                          <a:latin typeface="Segoe UI"/>
+                        </a:rPr>
                         <a:t>backend 8002 · frontend 5175</a:t>
                       </a:r>
                     </a:p>
                   </a:txBody>
                   <a:tcPr>
                     <a:solidFill>
-                      <a:srgbClr val="FFFFFF"/>
+                      <a:srgbClr val="F6F7F9"/>
                     </a:solidFill>
                   </a:tcPr>
                 </a:tc>
@@ -4225,7 +4271,7 @@
         </p:nvGraphicFramePr>
         <p:xfrm>
           <a:off x="566928" y="1691640"/>
-          <a:ext cx="11064240" cy="2286000"/>
+          <a:ext cx="11064240" cy="2743200"/>
         </p:xfrm>
         <a:graphic>
           <a:graphicData uri="http://schemas.openxmlformats.org/drawingml/2006/table">
@@ -4296,6 +4342,98 @@
                           </a:solidFill>
                           <a:latin typeface="Segoe UI"/>
                         </a:rPr>
+                        <a:t>FRAMEWORK_KEY</a:t>
+                      </a:r>
+                    </a:p>
+                  </a:txBody>
+                  <a:tcPr>
+                    <a:solidFill>
+                      <a:srgbClr val="FFFFFF"/>
+                    </a:solidFill>
+                  </a:tcPr>
+                </a:tc>
+                <a:tc>
+                  <a:txBody>
+                    <a:bodyPr wrap="square"/>
+                    <a:lstStyle/>
+                    <a:p>
+                      <a:r>
+                        <a:rPr sz="1100">
+                          <a:solidFill>
+                            <a:srgbClr val="1C2B3A"/>
+                          </a:solidFill>
+                          <a:latin typeface="Segoe UI"/>
+                        </a:rPr>
+                        <a:t>Which framework this service seeds + serves (prince2-7 / msp-5 / safe-essential)</a:t>
+                      </a:r>
+                    </a:p>
+                  </a:txBody>
+                  <a:tcPr>
+                    <a:solidFill>
+                      <a:srgbClr val="FFFFFF"/>
+                    </a:solidFill>
+                  </a:tcPr>
+                </a:tc>
+              </a:tr>
+              <a:tr h="457200">
+                <a:tc>
+                  <a:txBody>
+                    <a:bodyPr wrap="square"/>
+                    <a:lstStyle/>
+                    <a:p>
+                      <a:r>
+                        <a:rPr sz="1100">
+                          <a:solidFill>
+                            <a:srgbClr val="1C2B3A"/>
+                          </a:solidFill>
+                          <a:latin typeface="Segoe UI"/>
+                        </a:rPr>
+                        <a:t>APP_BASE</a:t>
+                      </a:r>
+                    </a:p>
+                  </a:txBody>
+                  <a:tcPr>
+                    <a:solidFill>
+                      <a:srgbClr val="F6F7F9"/>
+                    </a:solidFill>
+                  </a:tcPr>
+                </a:tc>
+                <a:tc>
+                  <a:txBody>
+                    <a:bodyPr wrap="square"/>
+                    <a:lstStyle/>
+                    <a:p>
+                      <a:r>
+                        <a:rPr sz="1100">
+                          <a:solidFill>
+                            <a:srgbClr val="1C2B3A"/>
+                          </a:solidFill>
+                          <a:latin typeface="Segoe UI"/>
+                        </a:rPr>
+                        <a:t>SPA base path for the front door (/prince2/ · /msp/ · /safe/)</a:t>
+                      </a:r>
+                    </a:p>
+                  </a:txBody>
+                  <a:tcPr>
+                    <a:solidFill>
+                      <a:srgbClr val="F6F7F9"/>
+                    </a:solidFill>
+                  </a:tcPr>
+                </a:tc>
+              </a:tr>
+              <a:tr h="457200">
+                <a:tc>
+                  <a:txBody>
+                    <a:bodyPr wrap="square"/>
+                    <a:lstStyle/>
+                    <a:p>
+                      <a:r>
+                        <a:rPr sz="1100">
+                          <a:solidFill>
+                            <a:srgbClr val="1C2B3A"/>
+                          </a:solidFill>
+                          <a:latin typeface="Segoe UI"/>
+                        </a:rPr>
                         <a:t>ADMIN_PASSWORD</a:t>
                       </a:r>
                     </a:p>
@@ -4318,7 +4456,7 @@
                           </a:solidFill>
                           <a:latin typeface="Segoe UI"/>
                         </a:rPr>
-                        <a:t>Unlocks authoring — CHANGE for production</a:t>
+                        <a:t>Unlocks authoring — CHANGE for production; per-service</a:t>
                       </a:r>
                     </a:p>
                   </a:txBody>
@@ -4388,7 +4526,7 @@
                           </a:solidFill>
                           <a:latin typeface="Segoe UI"/>
                         </a:rPr>
-                        <a:t>CORS_ORIGINS</a:t>
+                        <a:t>PORT</a:t>
                       </a:r>
                     </a:p>
                   </a:txBody>
@@ -4410,7 +4548,1216 @@
                           </a:solidFill>
                           <a:latin typeface="Segoe UI"/>
                         </a:rPr>
-                        <a:t>Allowed origins in split local dev</a:t>
+                        <a:t>Set by Render automatically</a:t>
+                      </a:r>
+                    </a:p>
+                  </a:txBody>
+                  <a:tcPr>
+                    <a:solidFill>
+                      <a:srgbClr val="FFFFFF"/>
+                    </a:solidFill>
+                  </a:tcPr>
+                </a:tc>
+              </a:tr>
+            </a:tbl>
+          </a:graphicData>
+        </a:graphic>
+      </p:graphicFrame>
+      <p:sp>
+        <p:nvSpPr>
+          <p:cNvPr id="5" name="TextBox 4"/>
+          <p:cNvSpPr txBox="1"/>
+          <p:nvPr/>
+        </p:nvSpPr>
+        <p:spPr>
+          <a:xfrm>
+            <a:off x="320040" y="6419088"/>
+            <a:ext cx="3657600" cy="365760"/>
+          </a:xfrm>
+          <a:prstGeom prst="rect">
+            <a:avLst/>
+          </a:prstGeom>
+          <a:noFill/>
+        </p:spPr>
+        <p:txBody>
+          <a:bodyPr wrap="square" anchor="t">
+            <a:spAutoFit/>
+          </a:bodyPr>
+          <a:lstStyle/>
+          <a:p>
+            <a:pPr algn="l">
+              <a:spcBef>
+                <a:spcPts val="0"/>
+              </a:spcBef>
+              <a:spcAft>
+                <a:spcPts val="600"/>
+              </a:spcAft>
+            </a:pPr>
+            <a:r>
+              <a:rPr sz="900" b="1">
+                <a:solidFill>
+                  <a:srgbClr val="A8841C"/>
+                </a:solidFill>
+                <a:latin typeface="Segoe UI"/>
+              </a:rPr>
+              <a:t>OFFICIAL-SENSITIVE</a:t>
+            </a:r>
+          </a:p>
+        </p:txBody>
+      </p:sp>
+      <p:sp>
+        <p:nvSpPr>
+          <p:cNvPr id="6" name="TextBox 5"/>
+          <p:cNvSpPr txBox="1"/>
+          <p:nvPr/>
+        </p:nvSpPr>
+        <p:spPr>
+          <a:xfrm>
+            <a:off x="10789920" y="6419088"/>
+            <a:ext cx="1097280" cy="365760"/>
+          </a:xfrm>
+          <a:prstGeom prst="rect">
+            <a:avLst/>
+          </a:prstGeom>
+          <a:noFill/>
+        </p:spPr>
+        <p:txBody>
+          <a:bodyPr wrap="square" anchor="t">
+            <a:spAutoFit/>
+          </a:bodyPr>
+          <a:lstStyle/>
+          <a:p>
+            <a:pPr algn="r">
+              <a:spcBef>
+                <a:spcPts val="0"/>
+              </a:spcBef>
+              <a:spcAft>
+                <a:spcPts val="600"/>
+              </a:spcAft>
+            </a:pPr>
+            <a:r>
+              <a:rPr sz="900" b="0">
+                <a:solidFill>
+                  <a:srgbClr val="5B6675"/>
+                </a:solidFill>
+                <a:latin typeface="Segoe UI"/>
+              </a:rPr>
+              <a:t>DOC-03  ·  3</a:t>
+            </a:r>
+          </a:p>
+        </p:txBody>
+      </p:sp>
+    </p:spTree>
+  </p:cSld>
+  <p:clrMapOvr>
+    <a:masterClrMapping/>
+  </p:clrMapOvr>
+</p:sld>
+</file>
+
+<file path=ppt/slides/slide4.xml><?xml version="1.0" encoding="utf-8"?>
+<p:sld xmlns:a="http://schemas.openxmlformats.org/drawingml/2006/main" xmlns:p="http://schemas.openxmlformats.org/presentationml/2006/main" xmlns:r="http://schemas.openxmlformats.org/officeDocument/2006/relationships">
+  <p:cSld>
+    <p:spTree>
+      <p:nvGrpSpPr>
+        <p:cNvPr id="1" name=""/>
+        <p:cNvGrpSpPr/>
+        <p:nvPr/>
+      </p:nvGrpSpPr>
+      <p:grpSpPr/>
+      <p:sp>
+        <p:nvSpPr>
+          <p:cNvPr id="2" name="TextBox 1"/>
+          <p:cNvSpPr txBox="1"/>
+          <p:nvPr/>
+        </p:nvSpPr>
+        <p:spPr>
+          <a:xfrm>
+            <a:off x="548640" y="411480"/>
+            <a:ext cx="10972800" cy="914400"/>
+          </a:xfrm>
+          <a:prstGeom prst="rect">
+            <a:avLst/>
+          </a:prstGeom>
+          <a:noFill/>
+        </p:spPr>
+        <p:txBody>
+          <a:bodyPr wrap="square" anchor="t">
+            <a:spAutoFit/>
+          </a:bodyPr>
+          <a:lstStyle/>
+          <a:p>
+            <a:pPr algn="l">
+              <a:spcBef>
+                <a:spcPts val="0"/>
+              </a:spcBef>
+              <a:spcAft>
+                <a:spcPts val="600"/>
+              </a:spcAft>
+            </a:pPr>
+            <a:r>
+              <a:rPr sz="2600" b="1">
+                <a:solidFill>
+                  <a:srgbClr val="0B2545"/>
+                </a:solidFill>
+                <a:latin typeface="Segoe UI Semibold"/>
+              </a:rPr>
+              <a:t>Running locally</a:t>
+            </a:r>
+          </a:p>
+        </p:txBody>
+      </p:sp>
+      <p:sp>
+        <p:nvSpPr>
+          <p:cNvPr id="3" name="Rectangle 2"/>
+          <p:cNvSpPr/>
+          <p:nvPr/>
+        </p:nvSpPr>
+        <p:spPr>
+          <a:xfrm>
+            <a:off x="566928" y="1207008"/>
+            <a:ext cx="2926080" cy="38100"/>
+          </a:xfrm>
+          <a:prstGeom prst="rect">
+            <a:avLst/>
+          </a:prstGeom>
+          <a:solidFill>
+            <a:srgbClr val="C9A227"/>
+          </a:solidFill>
+          <a:ln>
+            <a:noFill/>
+          </a:ln>
+          <a:effectLst/>
+        </p:spPr>
+        <p:style>
+          <a:lnRef idx="1">
+            <a:schemeClr val="accent1"/>
+          </a:lnRef>
+          <a:fillRef idx="3">
+            <a:schemeClr val="accent1"/>
+          </a:fillRef>
+          <a:effectRef idx="2">
+            <a:schemeClr val="accent1"/>
+          </a:effectRef>
+          <a:fontRef idx="minor">
+            <a:schemeClr val="lt1"/>
+          </a:fontRef>
+        </p:style>
+        <p:txBody>
+          <a:bodyPr rtlCol="0" anchor="ctr"/>
+          <a:lstStyle/>
+          <a:p>
+            <a:pPr algn="ctr"/>
+          </a:p>
+        </p:txBody>
+      </p:sp>
+      <p:sp>
+        <p:nvSpPr>
+          <p:cNvPr id="4" name="TextBox 3"/>
+          <p:cNvSpPr txBox="1"/>
+          <p:nvPr/>
+        </p:nvSpPr>
+        <p:spPr>
+          <a:xfrm>
+            <a:off x="640080" y="1600200"/>
+            <a:ext cx="10972800" cy="4251960"/>
+          </a:xfrm>
+          <a:prstGeom prst="rect">
+            <a:avLst/>
+          </a:prstGeom>
+          <a:noFill/>
+        </p:spPr>
+        <p:txBody>
+          <a:bodyPr wrap="square" anchor="t">
+            <a:spAutoFit/>
+          </a:bodyPr>
+          <a:lstStyle/>
+          <a:p>
+            <a:pPr algn="l">
+              <a:spcBef>
+                <a:spcPts val="0"/>
+              </a:spcBef>
+              <a:spcAft>
+                <a:spcPts val="1200"/>
+              </a:spcAft>
+            </a:pPr>
+            <a:r>
+              <a:rPr sz="1700" b="0">
+                <a:solidFill>
+                  <a:srgbClr val="1C2B3A"/>
+                </a:solidFill>
+                <a:latin typeface="Segoe UI"/>
+              </a:rPr>
+              <a:t>•  Backend: venv → pip install → python -m app.seed → uvicorn …:app --port 8002.</a:t>
+            </a:r>
+          </a:p>
+          <a:p>
+            <a:pPr algn="l">
+              <a:spcBef>
+                <a:spcPts val="0"/>
+              </a:spcBef>
+              <a:spcAft>
+                <a:spcPts val="1200"/>
+              </a:spcAft>
+            </a:pPr>
+            <a:r>
+              <a:rPr sz="1700" b="0">
+                <a:solidFill>
+                  <a:srgbClr val="1C2B3A"/>
+                </a:solidFill>
+                <a:latin typeface="Segoe UI"/>
+              </a:rPr>
+              <a:t>•  Front end: npm install → npm run dev -- --port 5175.</a:t>
+            </a:r>
+          </a:p>
+          <a:p>
+            <a:pPr algn="l">
+              <a:spcBef>
+                <a:spcPts val="0"/>
+              </a:spcBef>
+              <a:spcAft>
+                <a:spcPts val="1200"/>
+              </a:spcAft>
+            </a:pPr>
+            <a:r>
+              <a:rPr sz="1700" b="0">
+                <a:solidFill>
+                  <a:srgbClr val="1C2B3A"/>
+                </a:solidFill>
+                <a:latin typeface="Segoe UI"/>
+              </a:rPr>
+              <a:t>•  Registered in .claude/launch.json as method-map-backend / -frontend.</a:t>
+            </a:r>
+          </a:p>
+        </p:txBody>
+      </p:sp>
+      <p:sp>
+        <p:nvSpPr>
+          <p:cNvPr id="5" name="TextBox 4"/>
+          <p:cNvSpPr txBox="1"/>
+          <p:nvPr/>
+        </p:nvSpPr>
+        <p:spPr>
+          <a:xfrm>
+            <a:off x="320040" y="6419088"/>
+            <a:ext cx="3657600" cy="365760"/>
+          </a:xfrm>
+          <a:prstGeom prst="rect">
+            <a:avLst/>
+          </a:prstGeom>
+          <a:noFill/>
+        </p:spPr>
+        <p:txBody>
+          <a:bodyPr wrap="square" anchor="t">
+            <a:spAutoFit/>
+          </a:bodyPr>
+          <a:lstStyle/>
+          <a:p>
+            <a:pPr algn="l">
+              <a:spcBef>
+                <a:spcPts val="0"/>
+              </a:spcBef>
+              <a:spcAft>
+                <a:spcPts val="600"/>
+              </a:spcAft>
+            </a:pPr>
+            <a:r>
+              <a:rPr sz="900" b="1">
+                <a:solidFill>
+                  <a:srgbClr val="A8841C"/>
+                </a:solidFill>
+                <a:latin typeface="Segoe UI"/>
+              </a:rPr>
+              <a:t>OFFICIAL-SENSITIVE</a:t>
+            </a:r>
+          </a:p>
+        </p:txBody>
+      </p:sp>
+      <p:sp>
+        <p:nvSpPr>
+          <p:cNvPr id="6" name="TextBox 5"/>
+          <p:cNvSpPr txBox="1"/>
+          <p:nvPr/>
+        </p:nvSpPr>
+        <p:spPr>
+          <a:xfrm>
+            <a:off x="10789920" y="6419088"/>
+            <a:ext cx="1097280" cy="365760"/>
+          </a:xfrm>
+          <a:prstGeom prst="rect">
+            <a:avLst/>
+          </a:prstGeom>
+          <a:noFill/>
+        </p:spPr>
+        <p:txBody>
+          <a:bodyPr wrap="square" anchor="t">
+            <a:spAutoFit/>
+          </a:bodyPr>
+          <a:lstStyle/>
+          <a:p>
+            <a:pPr algn="r">
+              <a:spcBef>
+                <a:spcPts val="0"/>
+              </a:spcBef>
+              <a:spcAft>
+                <a:spcPts val="600"/>
+              </a:spcAft>
+            </a:pPr>
+            <a:r>
+              <a:rPr sz="900" b="0">
+                <a:solidFill>
+                  <a:srgbClr val="5B6675"/>
+                </a:solidFill>
+                <a:latin typeface="Segoe UI"/>
+              </a:rPr>
+              <a:t>DOC-03  ·  4</a:t>
+            </a:r>
+          </a:p>
+        </p:txBody>
+      </p:sp>
+    </p:spTree>
+  </p:cSld>
+  <p:clrMapOvr>
+    <a:masterClrMapping/>
+  </p:clrMapOvr>
+</p:sld>
+</file>
+
+<file path=ppt/slides/slide5.xml><?xml version="1.0" encoding="utf-8"?>
+<p:sld xmlns:a="http://schemas.openxmlformats.org/drawingml/2006/main" xmlns:p="http://schemas.openxmlformats.org/presentationml/2006/main" xmlns:r="http://schemas.openxmlformats.org/officeDocument/2006/relationships">
+  <p:cSld>
+    <p:spTree>
+      <p:nvGrpSpPr>
+        <p:cNvPr id="1" name=""/>
+        <p:cNvGrpSpPr/>
+        <p:nvPr/>
+      </p:nvGrpSpPr>
+      <p:grpSpPr/>
+      <p:sp>
+        <p:nvSpPr>
+          <p:cNvPr id="2" name="TextBox 1"/>
+          <p:cNvSpPr txBox="1"/>
+          <p:nvPr/>
+        </p:nvSpPr>
+        <p:spPr>
+          <a:xfrm>
+            <a:off x="548640" y="411480"/>
+            <a:ext cx="10972800" cy="914400"/>
+          </a:xfrm>
+          <a:prstGeom prst="rect">
+            <a:avLst/>
+          </a:prstGeom>
+          <a:noFill/>
+        </p:spPr>
+        <p:txBody>
+          <a:bodyPr wrap="square" anchor="t">
+            <a:spAutoFit/>
+          </a:bodyPr>
+          <a:lstStyle/>
+          <a:p>
+            <a:pPr algn="l">
+              <a:spcBef>
+                <a:spcPts val="0"/>
+              </a:spcBef>
+              <a:spcAft>
+                <a:spcPts val="600"/>
+              </a:spcAft>
+            </a:pPr>
+            <a:r>
+              <a:rPr sz="2600" b="1">
+                <a:solidFill>
+                  <a:srgbClr val="0B2545"/>
+                </a:solidFill>
+                <a:latin typeface="Segoe UI Semibold"/>
+              </a:rPr>
+              <a:t>Data management</a:t>
+            </a:r>
+          </a:p>
+        </p:txBody>
+      </p:sp>
+      <p:sp>
+        <p:nvSpPr>
+          <p:cNvPr id="3" name="Rectangle 2"/>
+          <p:cNvSpPr/>
+          <p:nvPr/>
+        </p:nvSpPr>
+        <p:spPr>
+          <a:xfrm>
+            <a:off x="566928" y="1207008"/>
+            <a:ext cx="2926080" cy="38100"/>
+          </a:xfrm>
+          <a:prstGeom prst="rect">
+            <a:avLst/>
+          </a:prstGeom>
+          <a:solidFill>
+            <a:srgbClr val="C9A227"/>
+          </a:solidFill>
+          <a:ln>
+            <a:noFill/>
+          </a:ln>
+          <a:effectLst/>
+        </p:spPr>
+        <p:style>
+          <a:lnRef idx="1">
+            <a:schemeClr val="accent1"/>
+          </a:lnRef>
+          <a:fillRef idx="3">
+            <a:schemeClr val="accent1"/>
+          </a:fillRef>
+          <a:effectRef idx="2">
+            <a:schemeClr val="accent1"/>
+          </a:effectRef>
+          <a:fontRef idx="minor">
+            <a:schemeClr val="lt1"/>
+          </a:fontRef>
+        </p:style>
+        <p:txBody>
+          <a:bodyPr rtlCol="0" anchor="ctr"/>
+          <a:lstStyle/>
+          <a:p>
+            <a:pPr algn="ctr"/>
+          </a:p>
+        </p:txBody>
+      </p:sp>
+      <p:sp>
+        <p:nvSpPr>
+          <p:cNvPr id="4" name="TextBox 3"/>
+          <p:cNvSpPr txBox="1"/>
+          <p:nvPr/>
+        </p:nvSpPr>
+        <p:spPr>
+          <a:xfrm>
+            <a:off x="640080" y="1600200"/>
+            <a:ext cx="10972800" cy="4251960"/>
+          </a:xfrm>
+          <a:prstGeom prst="rect">
+            <a:avLst/>
+          </a:prstGeom>
+          <a:noFill/>
+        </p:spPr>
+        <p:txBody>
+          <a:bodyPr wrap="square" anchor="t">
+            <a:spAutoFit/>
+          </a:bodyPr>
+          <a:lstStyle/>
+          <a:p>
+            <a:pPr algn="l">
+              <a:spcBef>
+                <a:spcPts val="0"/>
+              </a:spcBef>
+              <a:spcAft>
+                <a:spcPts val="1200"/>
+              </a:spcAft>
+            </a:pPr>
+            <a:r>
+              <a:rPr sz="1700" b="0">
+                <a:solidFill>
+                  <a:srgbClr val="1C2B3A"/>
+                </a:solidFill>
+                <a:latin typeface="Segoe UI"/>
+              </a:rPr>
+              <a:t>•  Auto-seeds from seed_data/*.json when the DB is empty.</a:t>
+            </a:r>
+          </a:p>
+          <a:p>
+            <a:pPr algn="l">
+              <a:spcBef>
+                <a:spcPts val="0"/>
+              </a:spcBef>
+              <a:spcAft>
+                <a:spcPts val="1200"/>
+              </a:spcAft>
+            </a:pPr>
+            <a:r>
+              <a:rPr sz="1700" b="0">
+                <a:solidFill>
+                  <a:srgbClr val="1C2B3A"/>
+                </a:solidFill>
+                <a:latin typeface="Segoe UI"/>
+              </a:rPr>
+              <a:t>•  Reseed: python -m app.seed --force.</a:t>
+            </a:r>
+          </a:p>
+          <a:p>
+            <a:pPr algn="l">
+              <a:spcBef>
+                <a:spcPts val="0"/>
+              </a:spcBef>
+              <a:spcAft>
+                <a:spcPts val="1200"/>
+              </a:spcAft>
+            </a:pPr>
+            <a:r>
+              <a:rPr sz="1700" b="0">
+                <a:solidFill>
+                  <a:srgbClr val="1C2B3A"/>
+                </a:solidFill>
+                <a:latin typeface="Segoe UI"/>
+              </a:rPr>
+              <a:t>•  Corrections not in the spreadsheet go in the CORRECTIONS list in the extractor.</a:t>
+            </a:r>
+          </a:p>
+          <a:p>
+            <a:pPr algn="l">
+              <a:spcBef>
+                <a:spcPts val="0"/>
+              </a:spcBef>
+              <a:spcAft>
+                <a:spcPts val="1200"/>
+              </a:spcAft>
+            </a:pPr>
+            <a:r>
+              <a:rPr sz="1700" b="0">
+                <a:solidFill>
+                  <a:srgbClr val="1C2B3A"/>
+                </a:solidFill>
+                <a:latin typeface="Segoe UI"/>
+              </a:rPr>
+              <a:t>•  After a schema change, delete the DB then reseed (create_all won't alter columns).</a:t>
+            </a:r>
+          </a:p>
+        </p:txBody>
+      </p:sp>
+      <p:sp>
+        <p:nvSpPr>
+          <p:cNvPr id="5" name="TextBox 4"/>
+          <p:cNvSpPr txBox="1"/>
+          <p:nvPr/>
+        </p:nvSpPr>
+        <p:spPr>
+          <a:xfrm>
+            <a:off x="320040" y="6419088"/>
+            <a:ext cx="3657600" cy="365760"/>
+          </a:xfrm>
+          <a:prstGeom prst="rect">
+            <a:avLst/>
+          </a:prstGeom>
+          <a:noFill/>
+        </p:spPr>
+        <p:txBody>
+          <a:bodyPr wrap="square" anchor="t">
+            <a:spAutoFit/>
+          </a:bodyPr>
+          <a:lstStyle/>
+          <a:p>
+            <a:pPr algn="l">
+              <a:spcBef>
+                <a:spcPts val="0"/>
+              </a:spcBef>
+              <a:spcAft>
+                <a:spcPts val="600"/>
+              </a:spcAft>
+            </a:pPr>
+            <a:r>
+              <a:rPr sz="900" b="1">
+                <a:solidFill>
+                  <a:srgbClr val="A8841C"/>
+                </a:solidFill>
+                <a:latin typeface="Segoe UI"/>
+              </a:rPr>
+              <a:t>OFFICIAL-SENSITIVE</a:t>
+            </a:r>
+          </a:p>
+        </p:txBody>
+      </p:sp>
+      <p:sp>
+        <p:nvSpPr>
+          <p:cNvPr id="6" name="TextBox 5"/>
+          <p:cNvSpPr txBox="1"/>
+          <p:nvPr/>
+        </p:nvSpPr>
+        <p:spPr>
+          <a:xfrm>
+            <a:off x="10789920" y="6419088"/>
+            <a:ext cx="1097280" cy="365760"/>
+          </a:xfrm>
+          <a:prstGeom prst="rect">
+            <a:avLst/>
+          </a:prstGeom>
+          <a:noFill/>
+        </p:spPr>
+        <p:txBody>
+          <a:bodyPr wrap="square" anchor="t">
+            <a:spAutoFit/>
+          </a:bodyPr>
+          <a:lstStyle/>
+          <a:p>
+            <a:pPr algn="r">
+              <a:spcBef>
+                <a:spcPts val="0"/>
+              </a:spcBef>
+              <a:spcAft>
+                <a:spcPts val="600"/>
+              </a:spcAft>
+            </a:pPr>
+            <a:r>
+              <a:rPr sz="900" b="0">
+                <a:solidFill>
+                  <a:srgbClr val="5B6675"/>
+                </a:solidFill>
+                <a:latin typeface="Segoe UI"/>
+              </a:rPr>
+              <a:t>DOC-03  ·  5</a:t>
+            </a:r>
+          </a:p>
+        </p:txBody>
+      </p:sp>
+    </p:spTree>
+  </p:cSld>
+  <p:clrMapOvr>
+    <a:masterClrMapping/>
+  </p:clrMapOvr>
+</p:sld>
+</file>
+
+<file path=ppt/slides/slide6.xml><?xml version="1.0" encoding="utf-8"?>
+<p:sld xmlns:a="http://schemas.openxmlformats.org/drawingml/2006/main" xmlns:p="http://schemas.openxmlformats.org/presentationml/2006/main" xmlns:r="http://schemas.openxmlformats.org/officeDocument/2006/relationships">
+  <p:cSld>
+    <p:spTree>
+      <p:nvGrpSpPr>
+        <p:cNvPr id="1" name=""/>
+        <p:cNvGrpSpPr/>
+        <p:nvPr/>
+      </p:nvGrpSpPr>
+      <p:grpSpPr/>
+      <p:sp>
+        <p:nvSpPr>
+          <p:cNvPr id="2" name="TextBox 1"/>
+          <p:cNvSpPr txBox="1"/>
+          <p:nvPr/>
+        </p:nvSpPr>
+        <p:spPr>
+          <a:xfrm>
+            <a:off x="548640" y="411480"/>
+            <a:ext cx="10972800" cy="914400"/>
+          </a:xfrm>
+          <a:prstGeom prst="rect">
+            <a:avLst/>
+          </a:prstGeom>
+          <a:noFill/>
+        </p:spPr>
+        <p:txBody>
+          <a:bodyPr wrap="square" anchor="t">
+            <a:spAutoFit/>
+          </a:bodyPr>
+          <a:lstStyle/>
+          <a:p>
+            <a:pPr algn="l">
+              <a:spcBef>
+                <a:spcPts val="0"/>
+              </a:spcBef>
+              <a:spcAft>
+                <a:spcPts val="600"/>
+              </a:spcAft>
+            </a:pPr>
+            <a:r>
+              <a:rPr sz="2600" b="1">
+                <a:solidFill>
+                  <a:srgbClr val="0B2545"/>
+                </a:solidFill>
+                <a:latin typeface="Segoe UI Semibold"/>
+              </a:rPr>
+              <a:t>Deployment</a:t>
+            </a:r>
+          </a:p>
+        </p:txBody>
+      </p:sp>
+      <p:sp>
+        <p:nvSpPr>
+          <p:cNvPr id="3" name="Rectangle 2"/>
+          <p:cNvSpPr/>
+          <p:nvPr/>
+        </p:nvSpPr>
+        <p:spPr>
+          <a:xfrm>
+            <a:off x="566928" y="1207008"/>
+            <a:ext cx="2926080" cy="38100"/>
+          </a:xfrm>
+          <a:prstGeom prst="rect">
+            <a:avLst/>
+          </a:prstGeom>
+          <a:solidFill>
+            <a:srgbClr val="C9A227"/>
+          </a:solidFill>
+          <a:ln>
+            <a:noFill/>
+          </a:ln>
+          <a:effectLst/>
+        </p:spPr>
+        <p:style>
+          <a:lnRef idx="1">
+            <a:schemeClr val="accent1"/>
+          </a:lnRef>
+          <a:fillRef idx="3">
+            <a:schemeClr val="accent1"/>
+          </a:fillRef>
+          <a:effectRef idx="2">
+            <a:schemeClr val="accent1"/>
+          </a:effectRef>
+          <a:fontRef idx="minor">
+            <a:schemeClr val="lt1"/>
+          </a:fontRef>
+        </p:style>
+        <p:txBody>
+          <a:bodyPr rtlCol="0" anchor="ctr"/>
+          <a:lstStyle/>
+          <a:p>
+            <a:pPr algn="ctr"/>
+          </a:p>
+        </p:txBody>
+      </p:sp>
+      <p:sp>
+        <p:nvSpPr>
+          <p:cNvPr id="4" name="TextBox 3"/>
+          <p:cNvSpPr txBox="1"/>
+          <p:nvPr/>
+        </p:nvSpPr>
+        <p:spPr>
+          <a:xfrm>
+            <a:off x="640080" y="1600200"/>
+            <a:ext cx="10972800" cy="4251960"/>
+          </a:xfrm>
+          <a:prstGeom prst="rect">
+            <a:avLst/>
+          </a:prstGeom>
+          <a:noFill/>
+        </p:spPr>
+        <p:txBody>
+          <a:bodyPr wrap="square" anchor="t">
+            <a:spAutoFit/>
+          </a:bodyPr>
+          <a:lstStyle/>
+          <a:p>
+            <a:pPr algn="l">
+              <a:spcBef>
+                <a:spcPts val="0"/>
+              </a:spcBef>
+              <a:spcAft>
+                <a:spcPts val="1200"/>
+              </a:spcAft>
+            </a:pPr>
+            <a:r>
+              <a:rPr sz="1700" b="0">
+                <a:solidFill>
+                  <a:srgbClr val="0B2545"/>
+                </a:solidFill>
+                <a:latin typeface="Segoe UI"/>
+              </a:rPr>
+              <a:t>•  Push to main → Render auto-builds and deploys every framework service.</a:t>
+            </a:r>
+          </a:p>
+          <a:p>
+            <a:pPr algn="l">
+              <a:spcBef>
+                <a:spcPts val="0"/>
+              </a:spcBef>
+              <a:spcAft>
+                <a:spcPts val="1200"/>
+              </a:spcAft>
+            </a:pPr>
+            <a:r>
+              <a:rPr sz="1700" b="0">
+                <a:solidFill>
+                  <a:srgbClr val="1C2B3A"/>
+                </a:solidFill>
+                <a:latin typeface="Segoe UI"/>
+              </a:rPr>
+              <a:t>•  One image per framework; FRAMEWORK_KEY + APP_BASE differ, nothing else.</a:t>
+            </a:r>
+          </a:p>
+          <a:p>
+            <a:pPr algn="l">
+              <a:spcBef>
+                <a:spcPts val="0"/>
+              </a:spcBef>
+              <a:spcAft>
+                <a:spcPts val="1200"/>
+              </a:spcAft>
+            </a:pPr>
+            <a:r>
+              <a:rPr sz="1700" b="0">
+                <a:solidFill>
+                  <a:srgbClr val="1C2B3A"/>
+                </a:solidFill>
+                <a:latin typeface="Segoe UI"/>
+              </a:rPr>
+              <a:t>•  DB re-seeds on boot, so bundled-data changes go live automatically.</a:t>
+            </a:r>
+          </a:p>
+          <a:p>
+            <a:pPr algn="l">
+              <a:spcBef>
+                <a:spcPts val="0"/>
+              </a:spcBef>
+              <a:spcAft>
+                <a:spcPts val="1200"/>
+              </a:spcAft>
+            </a:pPr>
+            <a:r>
+              <a:rPr sz="1700" b="0">
+                <a:solidFill>
+                  <a:srgbClr val="1C2B3A"/>
+                </a:solidFill>
+                <a:latin typeface="Segoe UI"/>
+              </a:rPr>
+              <a:t>•  New framework: add render.yaml service → sync Blueprint + set ADMIN_PASSWORD → add apps-gateway route.</a:t>
+            </a:r>
+          </a:p>
+          <a:p>
+            <a:pPr algn="l">
+              <a:spcBef>
+                <a:spcPts val="0"/>
+              </a:spcBef>
+              <a:spcAft>
+                <a:spcPts val="1200"/>
+              </a:spcAft>
+            </a:pPr>
+            <a:r>
+              <a:rPr sz="1700" b="0">
+                <a:solidFill>
+                  <a:srgbClr val="1C2B3A"/>
+                </a:solidFill>
+                <a:latin typeface="Segoe UI"/>
+              </a:rPr>
+              <a:t>•  In-app authoring edits are lost on redeploy (ephemeral disk).</a:t>
+            </a:r>
+          </a:p>
+        </p:txBody>
+      </p:sp>
+      <p:sp>
+        <p:nvSpPr>
+          <p:cNvPr id="5" name="TextBox 4"/>
+          <p:cNvSpPr txBox="1"/>
+          <p:nvPr/>
+        </p:nvSpPr>
+        <p:spPr>
+          <a:xfrm>
+            <a:off x="320040" y="6419088"/>
+            <a:ext cx="3657600" cy="365760"/>
+          </a:xfrm>
+          <a:prstGeom prst="rect">
+            <a:avLst/>
+          </a:prstGeom>
+          <a:noFill/>
+        </p:spPr>
+        <p:txBody>
+          <a:bodyPr wrap="square" anchor="t">
+            <a:spAutoFit/>
+          </a:bodyPr>
+          <a:lstStyle/>
+          <a:p>
+            <a:pPr algn="l">
+              <a:spcBef>
+                <a:spcPts val="0"/>
+              </a:spcBef>
+              <a:spcAft>
+                <a:spcPts val="600"/>
+              </a:spcAft>
+            </a:pPr>
+            <a:r>
+              <a:rPr sz="900" b="1">
+                <a:solidFill>
+                  <a:srgbClr val="A8841C"/>
+                </a:solidFill>
+                <a:latin typeface="Segoe UI"/>
+              </a:rPr>
+              <a:t>OFFICIAL-SENSITIVE</a:t>
+            </a:r>
+          </a:p>
+        </p:txBody>
+      </p:sp>
+      <p:sp>
+        <p:nvSpPr>
+          <p:cNvPr id="6" name="TextBox 5"/>
+          <p:cNvSpPr txBox="1"/>
+          <p:nvPr/>
+        </p:nvSpPr>
+        <p:spPr>
+          <a:xfrm>
+            <a:off x="10789920" y="6419088"/>
+            <a:ext cx="1097280" cy="365760"/>
+          </a:xfrm>
+          <a:prstGeom prst="rect">
+            <a:avLst/>
+          </a:prstGeom>
+          <a:noFill/>
+        </p:spPr>
+        <p:txBody>
+          <a:bodyPr wrap="square" anchor="t">
+            <a:spAutoFit/>
+          </a:bodyPr>
+          <a:lstStyle/>
+          <a:p>
+            <a:pPr algn="r">
+              <a:spcBef>
+                <a:spcPts val="0"/>
+              </a:spcBef>
+              <a:spcAft>
+                <a:spcPts val="600"/>
+              </a:spcAft>
+            </a:pPr>
+            <a:r>
+              <a:rPr sz="900" b="0">
+                <a:solidFill>
+                  <a:srgbClr val="5B6675"/>
+                </a:solidFill>
+                <a:latin typeface="Segoe UI"/>
+              </a:rPr>
+              <a:t>DOC-03  ·  6</a:t>
+            </a:r>
+          </a:p>
+        </p:txBody>
+      </p:sp>
+    </p:spTree>
+  </p:cSld>
+  <p:clrMapOvr>
+    <a:masterClrMapping/>
+  </p:clrMapOvr>
+</p:sld>
+</file>
+
+<file path=ppt/slides/slide7.xml><?xml version="1.0" encoding="utf-8"?>
+<p:sld xmlns:a="http://schemas.openxmlformats.org/drawingml/2006/main" xmlns:p="http://schemas.openxmlformats.org/presentationml/2006/main" xmlns:r="http://schemas.openxmlformats.org/officeDocument/2006/relationships">
+  <p:cSld>
+    <p:spTree>
+      <p:nvGrpSpPr>
+        <p:cNvPr id="1" name=""/>
+        <p:cNvGrpSpPr/>
+        <p:nvPr/>
+      </p:nvGrpSpPr>
+      <p:grpSpPr/>
+      <p:sp>
+        <p:nvSpPr>
+          <p:cNvPr id="2" name="TextBox 1"/>
+          <p:cNvSpPr txBox="1"/>
+          <p:nvPr/>
+        </p:nvSpPr>
+        <p:spPr>
+          <a:xfrm>
+            <a:off x="548640" y="411480"/>
+            <a:ext cx="10972800" cy="914400"/>
+          </a:xfrm>
+          <a:prstGeom prst="rect">
+            <a:avLst/>
+          </a:prstGeom>
+          <a:noFill/>
+        </p:spPr>
+        <p:txBody>
+          <a:bodyPr wrap="square" anchor="t">
+            <a:spAutoFit/>
+          </a:bodyPr>
+          <a:lstStyle/>
+          <a:p>
+            <a:pPr algn="l">
+              <a:spcBef>
+                <a:spcPts val="0"/>
+              </a:spcBef>
+              <a:spcAft>
+                <a:spcPts val="600"/>
+              </a:spcAft>
+            </a:pPr>
+            <a:r>
+              <a:rPr sz="2600" b="1">
+                <a:solidFill>
+                  <a:srgbClr val="0B2545"/>
+                </a:solidFill>
+                <a:latin typeface="Segoe UI Semibold"/>
+              </a:rPr>
+              <a:t>Front door (apps.p3mai.com)</a:t>
+            </a:r>
+          </a:p>
+        </p:txBody>
+      </p:sp>
+      <p:sp>
+        <p:nvSpPr>
+          <p:cNvPr id="3" name="Rectangle 2"/>
+          <p:cNvSpPr/>
+          <p:nvPr/>
+        </p:nvSpPr>
+        <p:spPr>
+          <a:xfrm>
+            <a:off x="566928" y="1207008"/>
+            <a:ext cx="2926080" cy="38100"/>
+          </a:xfrm>
+          <a:prstGeom prst="rect">
+            <a:avLst/>
+          </a:prstGeom>
+          <a:solidFill>
+            <a:srgbClr val="C9A227"/>
+          </a:solidFill>
+          <a:ln>
+            <a:noFill/>
+          </a:ln>
+          <a:effectLst/>
+        </p:spPr>
+        <p:style>
+          <a:lnRef idx="1">
+            <a:schemeClr val="accent1"/>
+          </a:lnRef>
+          <a:fillRef idx="3">
+            <a:schemeClr val="accent1"/>
+          </a:fillRef>
+          <a:effectRef idx="2">
+            <a:schemeClr val="accent1"/>
+          </a:effectRef>
+          <a:fontRef idx="minor">
+            <a:schemeClr val="lt1"/>
+          </a:fontRef>
+        </p:style>
+        <p:txBody>
+          <a:bodyPr rtlCol="0" anchor="ctr"/>
+          <a:lstStyle/>
+          <a:p>
+            <a:pPr algn="ctr"/>
+          </a:p>
+        </p:txBody>
+      </p:sp>
+      <p:sp>
+        <p:nvSpPr>
+          <p:cNvPr id="4" name="TextBox 3"/>
+          <p:cNvSpPr txBox="1"/>
+          <p:nvPr/>
+        </p:nvSpPr>
+        <p:spPr>
+          <a:xfrm>
+            <a:off x="566928" y="1554480"/>
+            <a:ext cx="11064240" cy="548640"/>
+          </a:xfrm>
+          <a:prstGeom prst="rect">
+            <a:avLst/>
+          </a:prstGeom>
+          <a:noFill/>
+        </p:spPr>
+        <p:txBody>
+          <a:bodyPr wrap="square" anchor="t">
+            <a:spAutoFit/>
+          </a:bodyPr>
+          <a:lstStyle/>
+          <a:p>
+            <a:pPr algn="l">
+              <a:spcBef>
+                <a:spcPts val="0"/>
+              </a:spcBef>
+              <a:spcAft>
+                <a:spcPts val="600"/>
+              </a:spcAft>
+            </a:pPr>
+            <a:r>
+              <a:rPr sz="1400" b="0">
+                <a:solidFill>
+                  <a:srgbClr val="5B6675"/>
+                </a:solidFill>
+                <a:latin typeface="Segoe UI"/>
+              </a:rPr>
+              <a:t>apps-gateway reverse proxy strips the slug; one line per framework in ORIGINS.</a:t>
+            </a:r>
+          </a:p>
+        </p:txBody>
+      </p:sp>
+      <p:graphicFrame>
+        <p:nvGraphicFramePr>
+          <p:cNvPr id="5" name="Table 4"/>
+          <p:cNvGraphicFramePr>
+            <a:graphicFrameLocks noGrp="1"/>
+          </p:cNvGraphicFramePr>
+          <p:nvPr/>
+        </p:nvGraphicFramePr>
+        <p:xfrm>
+          <a:off x="566928" y="2103120"/>
+          <a:ext cx="8503920" cy="1828800"/>
+        </p:xfrm>
+        <a:graphic>
+          <a:graphicData uri="http://schemas.openxmlformats.org/drawingml/2006/table">
+            <a:tbl>
+              <a:tblPr firstRow="1" bandRow="1">
+                <a:tableStyleId>{5C22544A-7EE6-4342-B048-85BDC9FD1C3A}</a:tableStyleId>
+              </a:tblPr>
+              <a:tblGrid>
+                <a:gridCol w="2377440"/>
+                <a:gridCol w="6126480"/>
+              </a:tblGrid>
+              <a:tr h="457200">
+                <a:tc>
+                  <a:txBody>
+                    <a:bodyPr wrap="square"/>
+                    <a:lstStyle/>
+                    <a:p>
+                      <a:r>
+                        <a:rPr b="1" sz="1200">
+                          <a:solidFill>
+                            <a:srgbClr val="FFFFFF"/>
+                          </a:solidFill>
+                          <a:latin typeface="Segoe UI Semibold"/>
+                        </a:rPr>
+                        <a:t>Slug</a:t>
+                      </a:r>
+                    </a:p>
+                  </a:txBody>
+                  <a:tcPr>
+                    <a:solidFill>
+                      <a:srgbClr val="0B2545"/>
+                    </a:solidFill>
+                  </a:tcPr>
+                </a:tc>
+                <a:tc>
+                  <a:txBody>
+                    <a:bodyPr wrap="square"/>
+                    <a:lstStyle/>
+                    <a:p>
+                      <a:r>
+                        <a:rPr b="1" sz="1200">
+                          <a:solidFill>
+                            <a:srgbClr val="FFFFFF"/>
+                          </a:solidFill>
+                          <a:latin typeface="Segoe UI Semibold"/>
+                        </a:rPr>
+                        <a:t>Service</a:t>
+                      </a:r>
+                    </a:p>
+                  </a:txBody>
+                  <a:tcPr>
+                    <a:solidFill>
+                      <a:srgbClr val="0B2545"/>
+                    </a:solidFill>
+                  </a:tcPr>
+                </a:tc>
+              </a:tr>
+              <a:tr h="457200">
+                <a:tc>
+                  <a:txBody>
+                    <a:bodyPr wrap="square"/>
+                    <a:lstStyle/>
+                    <a:p>
+                      <a:r>
+                        <a:rPr sz="1100">
+                          <a:solidFill>
+                            <a:srgbClr val="1C2B3A"/>
+                          </a:solidFill>
+                          <a:latin typeface="Segoe UI"/>
+                        </a:rPr>
+                        <a:t>/prince2</a:t>
+                      </a:r>
+                    </a:p>
+                  </a:txBody>
+                  <a:tcPr>
+                    <a:solidFill>
+                      <a:srgbClr val="FFFFFF"/>
+                    </a:solidFill>
+                  </a:tcPr>
+                </a:tc>
+                <a:tc>
+                  <a:txBody>
+                    <a:bodyPr wrap="square"/>
+                    <a:lstStyle/>
+                    <a:p>
+                      <a:r>
+                        <a:rPr sz="1100">
+                          <a:solidFill>
+                            <a:srgbClr val="1C2B3A"/>
+                          </a:solidFill>
+                          <a:latin typeface="Segoe UI"/>
+                        </a:rPr>
+                        <a:t>method-map.onrender.com</a:t>
                       </a:r>
                     </a:p>
                   </a:txBody>
@@ -4434,7 +5781,7 @@
                           </a:solidFill>
                           <a:latin typeface="Segoe UI"/>
                         </a:rPr>
-                        <a:t>PORT</a:t>
+                        <a:t>/msp</a:t>
                       </a:r>
                     </a:p>
                   </a:txBody>
@@ -4456,1180 +5803,13 @@
                           </a:solidFill>
                           <a:latin typeface="Segoe UI"/>
                         </a:rPr>
-                        <a:t>Set by Render automatically</a:t>
+                        <a:t>msp-method-map.onrender.com</a:t>
                       </a:r>
                     </a:p>
                   </a:txBody>
                   <a:tcPr>
                     <a:solidFill>
                       <a:srgbClr val="F6F7F9"/>
-                    </a:solidFill>
-                  </a:tcPr>
-                </a:tc>
-              </a:tr>
-            </a:tbl>
-          </a:graphicData>
-        </a:graphic>
-      </p:graphicFrame>
-      <p:sp>
-        <p:nvSpPr>
-          <p:cNvPr id="5" name="TextBox 4"/>
-          <p:cNvSpPr txBox="1"/>
-          <p:nvPr/>
-        </p:nvSpPr>
-        <p:spPr>
-          <a:xfrm>
-            <a:off x="320040" y="6419088"/>
-            <a:ext cx="3657600" cy="365760"/>
-          </a:xfrm>
-          <a:prstGeom prst="rect">
-            <a:avLst/>
-          </a:prstGeom>
-          <a:noFill/>
-        </p:spPr>
-        <p:txBody>
-          <a:bodyPr wrap="square" anchor="t">
-            <a:spAutoFit/>
-          </a:bodyPr>
-          <a:lstStyle/>
-          <a:p>
-            <a:pPr algn="l">
-              <a:spcBef>
-                <a:spcPts val="0"/>
-              </a:spcBef>
-              <a:spcAft>
-                <a:spcPts val="600"/>
-              </a:spcAft>
-            </a:pPr>
-            <a:r>
-              <a:rPr sz="900" b="1">
-                <a:solidFill>
-                  <a:srgbClr val="A8841C"/>
-                </a:solidFill>
-                <a:latin typeface="Segoe UI"/>
-              </a:rPr>
-              <a:t>OFFICIAL-SENSITIVE</a:t>
-            </a:r>
-          </a:p>
-        </p:txBody>
-      </p:sp>
-      <p:sp>
-        <p:nvSpPr>
-          <p:cNvPr id="6" name="TextBox 5"/>
-          <p:cNvSpPr txBox="1"/>
-          <p:nvPr/>
-        </p:nvSpPr>
-        <p:spPr>
-          <a:xfrm>
-            <a:off x="10789920" y="6419088"/>
-            <a:ext cx="1097280" cy="365760"/>
-          </a:xfrm>
-          <a:prstGeom prst="rect">
-            <a:avLst/>
-          </a:prstGeom>
-          <a:noFill/>
-        </p:spPr>
-        <p:txBody>
-          <a:bodyPr wrap="square" anchor="t">
-            <a:spAutoFit/>
-          </a:bodyPr>
-          <a:lstStyle/>
-          <a:p>
-            <a:pPr algn="r">
-              <a:spcBef>
-                <a:spcPts val="0"/>
-              </a:spcBef>
-              <a:spcAft>
-                <a:spcPts val="600"/>
-              </a:spcAft>
-            </a:pPr>
-            <a:r>
-              <a:rPr sz="900" b="0">
-                <a:solidFill>
-                  <a:srgbClr val="5B6675"/>
-                </a:solidFill>
-                <a:latin typeface="Segoe UI"/>
-              </a:rPr>
-              <a:t>DOC-03  ·  3</a:t>
-            </a:r>
-          </a:p>
-        </p:txBody>
-      </p:sp>
-    </p:spTree>
-  </p:cSld>
-  <p:clrMapOvr>
-    <a:masterClrMapping/>
-  </p:clrMapOvr>
-</p:sld>
-</file>
-
-<file path=ppt/slides/slide4.xml><?xml version="1.0" encoding="utf-8"?>
-<p:sld xmlns:a="http://schemas.openxmlformats.org/drawingml/2006/main" xmlns:p="http://schemas.openxmlformats.org/presentationml/2006/main" xmlns:r="http://schemas.openxmlformats.org/officeDocument/2006/relationships">
-  <p:cSld>
-    <p:spTree>
-      <p:nvGrpSpPr>
-        <p:cNvPr id="1" name=""/>
-        <p:cNvGrpSpPr/>
-        <p:nvPr/>
-      </p:nvGrpSpPr>
-      <p:grpSpPr/>
-      <p:sp>
-        <p:nvSpPr>
-          <p:cNvPr id="2" name="TextBox 1"/>
-          <p:cNvSpPr txBox="1"/>
-          <p:nvPr/>
-        </p:nvSpPr>
-        <p:spPr>
-          <a:xfrm>
-            <a:off x="548640" y="411480"/>
-            <a:ext cx="10972800" cy="914400"/>
-          </a:xfrm>
-          <a:prstGeom prst="rect">
-            <a:avLst/>
-          </a:prstGeom>
-          <a:noFill/>
-        </p:spPr>
-        <p:txBody>
-          <a:bodyPr wrap="square" anchor="t">
-            <a:spAutoFit/>
-          </a:bodyPr>
-          <a:lstStyle/>
-          <a:p>
-            <a:pPr algn="l">
-              <a:spcBef>
-                <a:spcPts val="0"/>
-              </a:spcBef>
-              <a:spcAft>
-                <a:spcPts val="600"/>
-              </a:spcAft>
-            </a:pPr>
-            <a:r>
-              <a:rPr sz="2600" b="1">
-                <a:solidFill>
-                  <a:srgbClr val="0B2545"/>
-                </a:solidFill>
-                <a:latin typeface="Segoe UI Semibold"/>
-              </a:rPr>
-              <a:t>Running locally</a:t>
-            </a:r>
-          </a:p>
-        </p:txBody>
-      </p:sp>
-      <p:sp>
-        <p:nvSpPr>
-          <p:cNvPr id="3" name="Rectangle 2"/>
-          <p:cNvSpPr/>
-          <p:nvPr/>
-        </p:nvSpPr>
-        <p:spPr>
-          <a:xfrm>
-            <a:off x="566928" y="1207008"/>
-            <a:ext cx="2926080" cy="38100"/>
-          </a:xfrm>
-          <a:prstGeom prst="rect">
-            <a:avLst/>
-          </a:prstGeom>
-          <a:solidFill>
-            <a:srgbClr val="C9A227"/>
-          </a:solidFill>
-          <a:ln>
-            <a:noFill/>
-          </a:ln>
-          <a:effectLst/>
-        </p:spPr>
-        <p:style>
-          <a:lnRef idx="1">
-            <a:schemeClr val="accent1"/>
-          </a:lnRef>
-          <a:fillRef idx="3">
-            <a:schemeClr val="accent1"/>
-          </a:fillRef>
-          <a:effectRef idx="2">
-            <a:schemeClr val="accent1"/>
-          </a:effectRef>
-          <a:fontRef idx="minor">
-            <a:schemeClr val="lt1"/>
-          </a:fontRef>
-        </p:style>
-        <p:txBody>
-          <a:bodyPr rtlCol="0" anchor="ctr"/>
-          <a:lstStyle/>
-          <a:p>
-            <a:pPr algn="ctr"/>
-          </a:p>
-        </p:txBody>
-      </p:sp>
-      <p:sp>
-        <p:nvSpPr>
-          <p:cNvPr id="4" name="TextBox 3"/>
-          <p:cNvSpPr txBox="1"/>
-          <p:nvPr/>
-        </p:nvSpPr>
-        <p:spPr>
-          <a:xfrm>
-            <a:off x="640080" y="1600200"/>
-            <a:ext cx="10972800" cy="4251960"/>
-          </a:xfrm>
-          <a:prstGeom prst="rect">
-            <a:avLst/>
-          </a:prstGeom>
-          <a:noFill/>
-        </p:spPr>
-        <p:txBody>
-          <a:bodyPr wrap="square" anchor="t">
-            <a:spAutoFit/>
-          </a:bodyPr>
-          <a:lstStyle/>
-          <a:p>
-            <a:pPr algn="l">
-              <a:spcBef>
-                <a:spcPts val="0"/>
-              </a:spcBef>
-              <a:spcAft>
-                <a:spcPts val="1200"/>
-              </a:spcAft>
-            </a:pPr>
-            <a:r>
-              <a:rPr sz="1700" b="0">
-                <a:solidFill>
-                  <a:srgbClr val="1C2B3A"/>
-                </a:solidFill>
-                <a:latin typeface="Segoe UI"/>
-              </a:rPr>
-              <a:t>•  Backend: venv → pip install → python -m app.seed → uvicorn …:app --port 8002.</a:t>
-            </a:r>
-          </a:p>
-          <a:p>
-            <a:pPr algn="l">
-              <a:spcBef>
-                <a:spcPts val="0"/>
-              </a:spcBef>
-              <a:spcAft>
-                <a:spcPts val="1200"/>
-              </a:spcAft>
-            </a:pPr>
-            <a:r>
-              <a:rPr sz="1700" b="0">
-                <a:solidFill>
-                  <a:srgbClr val="1C2B3A"/>
-                </a:solidFill>
-                <a:latin typeface="Segoe UI"/>
-              </a:rPr>
-              <a:t>•  Front end: npm install → npm run dev -- --port 5175.</a:t>
-            </a:r>
-          </a:p>
-          <a:p>
-            <a:pPr algn="l">
-              <a:spcBef>
-                <a:spcPts val="0"/>
-              </a:spcBef>
-              <a:spcAft>
-                <a:spcPts val="1200"/>
-              </a:spcAft>
-            </a:pPr>
-            <a:r>
-              <a:rPr sz="1700" b="0">
-                <a:solidFill>
-                  <a:srgbClr val="1C2B3A"/>
-                </a:solidFill>
-                <a:latin typeface="Segoe UI"/>
-              </a:rPr>
-              <a:t>•  Registered in .claude/launch.json as method-map-backend / -frontend.</a:t>
-            </a:r>
-          </a:p>
-        </p:txBody>
-      </p:sp>
-      <p:sp>
-        <p:nvSpPr>
-          <p:cNvPr id="5" name="TextBox 4"/>
-          <p:cNvSpPr txBox="1"/>
-          <p:nvPr/>
-        </p:nvSpPr>
-        <p:spPr>
-          <a:xfrm>
-            <a:off x="320040" y="6419088"/>
-            <a:ext cx="3657600" cy="365760"/>
-          </a:xfrm>
-          <a:prstGeom prst="rect">
-            <a:avLst/>
-          </a:prstGeom>
-          <a:noFill/>
-        </p:spPr>
-        <p:txBody>
-          <a:bodyPr wrap="square" anchor="t">
-            <a:spAutoFit/>
-          </a:bodyPr>
-          <a:lstStyle/>
-          <a:p>
-            <a:pPr algn="l">
-              <a:spcBef>
-                <a:spcPts val="0"/>
-              </a:spcBef>
-              <a:spcAft>
-                <a:spcPts val="600"/>
-              </a:spcAft>
-            </a:pPr>
-            <a:r>
-              <a:rPr sz="900" b="1">
-                <a:solidFill>
-                  <a:srgbClr val="A8841C"/>
-                </a:solidFill>
-                <a:latin typeface="Segoe UI"/>
-              </a:rPr>
-              <a:t>OFFICIAL-SENSITIVE</a:t>
-            </a:r>
-          </a:p>
-        </p:txBody>
-      </p:sp>
-      <p:sp>
-        <p:nvSpPr>
-          <p:cNvPr id="6" name="TextBox 5"/>
-          <p:cNvSpPr txBox="1"/>
-          <p:nvPr/>
-        </p:nvSpPr>
-        <p:spPr>
-          <a:xfrm>
-            <a:off x="10789920" y="6419088"/>
-            <a:ext cx="1097280" cy="365760"/>
-          </a:xfrm>
-          <a:prstGeom prst="rect">
-            <a:avLst/>
-          </a:prstGeom>
-          <a:noFill/>
-        </p:spPr>
-        <p:txBody>
-          <a:bodyPr wrap="square" anchor="t">
-            <a:spAutoFit/>
-          </a:bodyPr>
-          <a:lstStyle/>
-          <a:p>
-            <a:pPr algn="r">
-              <a:spcBef>
-                <a:spcPts val="0"/>
-              </a:spcBef>
-              <a:spcAft>
-                <a:spcPts val="600"/>
-              </a:spcAft>
-            </a:pPr>
-            <a:r>
-              <a:rPr sz="900" b="0">
-                <a:solidFill>
-                  <a:srgbClr val="5B6675"/>
-                </a:solidFill>
-                <a:latin typeface="Segoe UI"/>
-              </a:rPr>
-              <a:t>DOC-03  ·  4</a:t>
-            </a:r>
-          </a:p>
-        </p:txBody>
-      </p:sp>
-    </p:spTree>
-  </p:cSld>
-  <p:clrMapOvr>
-    <a:masterClrMapping/>
-  </p:clrMapOvr>
-</p:sld>
-</file>
-
-<file path=ppt/slides/slide5.xml><?xml version="1.0" encoding="utf-8"?>
-<p:sld xmlns:a="http://schemas.openxmlformats.org/drawingml/2006/main" xmlns:p="http://schemas.openxmlformats.org/presentationml/2006/main" xmlns:r="http://schemas.openxmlformats.org/officeDocument/2006/relationships">
-  <p:cSld>
-    <p:spTree>
-      <p:nvGrpSpPr>
-        <p:cNvPr id="1" name=""/>
-        <p:cNvGrpSpPr/>
-        <p:nvPr/>
-      </p:nvGrpSpPr>
-      <p:grpSpPr/>
-      <p:sp>
-        <p:nvSpPr>
-          <p:cNvPr id="2" name="TextBox 1"/>
-          <p:cNvSpPr txBox="1"/>
-          <p:nvPr/>
-        </p:nvSpPr>
-        <p:spPr>
-          <a:xfrm>
-            <a:off x="548640" y="411480"/>
-            <a:ext cx="10972800" cy="914400"/>
-          </a:xfrm>
-          <a:prstGeom prst="rect">
-            <a:avLst/>
-          </a:prstGeom>
-          <a:noFill/>
-        </p:spPr>
-        <p:txBody>
-          <a:bodyPr wrap="square" anchor="t">
-            <a:spAutoFit/>
-          </a:bodyPr>
-          <a:lstStyle/>
-          <a:p>
-            <a:pPr algn="l">
-              <a:spcBef>
-                <a:spcPts val="0"/>
-              </a:spcBef>
-              <a:spcAft>
-                <a:spcPts val="600"/>
-              </a:spcAft>
-            </a:pPr>
-            <a:r>
-              <a:rPr sz="2600" b="1">
-                <a:solidFill>
-                  <a:srgbClr val="0B2545"/>
-                </a:solidFill>
-                <a:latin typeface="Segoe UI Semibold"/>
-              </a:rPr>
-              <a:t>Data management</a:t>
-            </a:r>
-          </a:p>
-        </p:txBody>
-      </p:sp>
-      <p:sp>
-        <p:nvSpPr>
-          <p:cNvPr id="3" name="Rectangle 2"/>
-          <p:cNvSpPr/>
-          <p:nvPr/>
-        </p:nvSpPr>
-        <p:spPr>
-          <a:xfrm>
-            <a:off x="566928" y="1207008"/>
-            <a:ext cx="2926080" cy="38100"/>
-          </a:xfrm>
-          <a:prstGeom prst="rect">
-            <a:avLst/>
-          </a:prstGeom>
-          <a:solidFill>
-            <a:srgbClr val="C9A227"/>
-          </a:solidFill>
-          <a:ln>
-            <a:noFill/>
-          </a:ln>
-          <a:effectLst/>
-        </p:spPr>
-        <p:style>
-          <a:lnRef idx="1">
-            <a:schemeClr val="accent1"/>
-          </a:lnRef>
-          <a:fillRef idx="3">
-            <a:schemeClr val="accent1"/>
-          </a:fillRef>
-          <a:effectRef idx="2">
-            <a:schemeClr val="accent1"/>
-          </a:effectRef>
-          <a:fontRef idx="minor">
-            <a:schemeClr val="lt1"/>
-          </a:fontRef>
-        </p:style>
-        <p:txBody>
-          <a:bodyPr rtlCol="0" anchor="ctr"/>
-          <a:lstStyle/>
-          <a:p>
-            <a:pPr algn="ctr"/>
-          </a:p>
-        </p:txBody>
-      </p:sp>
-      <p:sp>
-        <p:nvSpPr>
-          <p:cNvPr id="4" name="TextBox 3"/>
-          <p:cNvSpPr txBox="1"/>
-          <p:nvPr/>
-        </p:nvSpPr>
-        <p:spPr>
-          <a:xfrm>
-            <a:off x="640080" y="1600200"/>
-            <a:ext cx="10972800" cy="4251960"/>
-          </a:xfrm>
-          <a:prstGeom prst="rect">
-            <a:avLst/>
-          </a:prstGeom>
-          <a:noFill/>
-        </p:spPr>
-        <p:txBody>
-          <a:bodyPr wrap="square" anchor="t">
-            <a:spAutoFit/>
-          </a:bodyPr>
-          <a:lstStyle/>
-          <a:p>
-            <a:pPr algn="l">
-              <a:spcBef>
-                <a:spcPts val="0"/>
-              </a:spcBef>
-              <a:spcAft>
-                <a:spcPts val="1200"/>
-              </a:spcAft>
-            </a:pPr>
-            <a:r>
-              <a:rPr sz="1700" b="0">
-                <a:solidFill>
-                  <a:srgbClr val="1C2B3A"/>
-                </a:solidFill>
-                <a:latin typeface="Segoe UI"/>
-              </a:rPr>
-              <a:t>•  Auto-seeds from seed_data/*.json when the DB is empty.</a:t>
-            </a:r>
-          </a:p>
-          <a:p>
-            <a:pPr algn="l">
-              <a:spcBef>
-                <a:spcPts val="0"/>
-              </a:spcBef>
-              <a:spcAft>
-                <a:spcPts val="1200"/>
-              </a:spcAft>
-            </a:pPr>
-            <a:r>
-              <a:rPr sz="1700" b="0">
-                <a:solidFill>
-                  <a:srgbClr val="1C2B3A"/>
-                </a:solidFill>
-                <a:latin typeface="Segoe UI"/>
-              </a:rPr>
-              <a:t>•  Reseed: python -m app.seed --force.</a:t>
-            </a:r>
-          </a:p>
-          <a:p>
-            <a:pPr algn="l">
-              <a:spcBef>
-                <a:spcPts val="0"/>
-              </a:spcBef>
-              <a:spcAft>
-                <a:spcPts val="1200"/>
-              </a:spcAft>
-            </a:pPr>
-            <a:r>
-              <a:rPr sz="1700" b="0">
-                <a:solidFill>
-                  <a:srgbClr val="1C2B3A"/>
-                </a:solidFill>
-                <a:latin typeface="Segoe UI"/>
-              </a:rPr>
-              <a:t>•  Corrections not in the spreadsheet go in the CORRECTIONS list in the extractor.</a:t>
-            </a:r>
-          </a:p>
-          <a:p>
-            <a:pPr algn="l">
-              <a:spcBef>
-                <a:spcPts val="0"/>
-              </a:spcBef>
-              <a:spcAft>
-                <a:spcPts val="1200"/>
-              </a:spcAft>
-            </a:pPr>
-            <a:r>
-              <a:rPr sz="1700" b="0">
-                <a:solidFill>
-                  <a:srgbClr val="1C2B3A"/>
-                </a:solidFill>
-                <a:latin typeface="Segoe UI"/>
-              </a:rPr>
-              <a:t>•  After a schema change, delete the DB then reseed (create_all won't alter columns).</a:t>
-            </a:r>
-          </a:p>
-        </p:txBody>
-      </p:sp>
-      <p:sp>
-        <p:nvSpPr>
-          <p:cNvPr id="5" name="TextBox 4"/>
-          <p:cNvSpPr txBox="1"/>
-          <p:nvPr/>
-        </p:nvSpPr>
-        <p:spPr>
-          <a:xfrm>
-            <a:off x="320040" y="6419088"/>
-            <a:ext cx="3657600" cy="365760"/>
-          </a:xfrm>
-          <a:prstGeom prst="rect">
-            <a:avLst/>
-          </a:prstGeom>
-          <a:noFill/>
-        </p:spPr>
-        <p:txBody>
-          <a:bodyPr wrap="square" anchor="t">
-            <a:spAutoFit/>
-          </a:bodyPr>
-          <a:lstStyle/>
-          <a:p>
-            <a:pPr algn="l">
-              <a:spcBef>
-                <a:spcPts val="0"/>
-              </a:spcBef>
-              <a:spcAft>
-                <a:spcPts val="600"/>
-              </a:spcAft>
-            </a:pPr>
-            <a:r>
-              <a:rPr sz="900" b="1">
-                <a:solidFill>
-                  <a:srgbClr val="A8841C"/>
-                </a:solidFill>
-                <a:latin typeface="Segoe UI"/>
-              </a:rPr>
-              <a:t>OFFICIAL-SENSITIVE</a:t>
-            </a:r>
-          </a:p>
-        </p:txBody>
-      </p:sp>
-      <p:sp>
-        <p:nvSpPr>
-          <p:cNvPr id="6" name="TextBox 5"/>
-          <p:cNvSpPr txBox="1"/>
-          <p:nvPr/>
-        </p:nvSpPr>
-        <p:spPr>
-          <a:xfrm>
-            <a:off x="10789920" y="6419088"/>
-            <a:ext cx="1097280" cy="365760"/>
-          </a:xfrm>
-          <a:prstGeom prst="rect">
-            <a:avLst/>
-          </a:prstGeom>
-          <a:noFill/>
-        </p:spPr>
-        <p:txBody>
-          <a:bodyPr wrap="square" anchor="t">
-            <a:spAutoFit/>
-          </a:bodyPr>
-          <a:lstStyle/>
-          <a:p>
-            <a:pPr algn="r">
-              <a:spcBef>
-                <a:spcPts val="0"/>
-              </a:spcBef>
-              <a:spcAft>
-                <a:spcPts val="600"/>
-              </a:spcAft>
-            </a:pPr>
-            <a:r>
-              <a:rPr sz="900" b="0">
-                <a:solidFill>
-                  <a:srgbClr val="5B6675"/>
-                </a:solidFill>
-                <a:latin typeface="Segoe UI"/>
-              </a:rPr>
-              <a:t>DOC-03  ·  5</a:t>
-            </a:r>
-          </a:p>
-        </p:txBody>
-      </p:sp>
-    </p:spTree>
-  </p:cSld>
-  <p:clrMapOvr>
-    <a:masterClrMapping/>
-  </p:clrMapOvr>
-</p:sld>
-</file>
-
-<file path=ppt/slides/slide6.xml><?xml version="1.0" encoding="utf-8"?>
-<p:sld xmlns:a="http://schemas.openxmlformats.org/drawingml/2006/main" xmlns:p="http://schemas.openxmlformats.org/presentationml/2006/main" xmlns:r="http://schemas.openxmlformats.org/officeDocument/2006/relationships">
-  <p:cSld>
-    <p:spTree>
-      <p:nvGrpSpPr>
-        <p:cNvPr id="1" name=""/>
-        <p:cNvGrpSpPr/>
-        <p:nvPr/>
-      </p:nvGrpSpPr>
-      <p:grpSpPr/>
-      <p:sp>
-        <p:nvSpPr>
-          <p:cNvPr id="2" name="TextBox 1"/>
-          <p:cNvSpPr txBox="1"/>
-          <p:nvPr/>
-        </p:nvSpPr>
-        <p:spPr>
-          <a:xfrm>
-            <a:off x="548640" y="411480"/>
-            <a:ext cx="10972800" cy="914400"/>
-          </a:xfrm>
-          <a:prstGeom prst="rect">
-            <a:avLst/>
-          </a:prstGeom>
-          <a:noFill/>
-        </p:spPr>
-        <p:txBody>
-          <a:bodyPr wrap="square" anchor="t">
-            <a:spAutoFit/>
-          </a:bodyPr>
-          <a:lstStyle/>
-          <a:p>
-            <a:pPr algn="l">
-              <a:spcBef>
-                <a:spcPts val="0"/>
-              </a:spcBef>
-              <a:spcAft>
-                <a:spcPts val="600"/>
-              </a:spcAft>
-            </a:pPr>
-            <a:r>
-              <a:rPr sz="2600" b="1">
-                <a:solidFill>
-                  <a:srgbClr val="0B2545"/>
-                </a:solidFill>
-                <a:latin typeface="Segoe UI Semibold"/>
-              </a:rPr>
-              <a:t>Deployment</a:t>
-            </a:r>
-          </a:p>
-        </p:txBody>
-      </p:sp>
-      <p:sp>
-        <p:nvSpPr>
-          <p:cNvPr id="3" name="Rectangle 2"/>
-          <p:cNvSpPr/>
-          <p:nvPr/>
-        </p:nvSpPr>
-        <p:spPr>
-          <a:xfrm>
-            <a:off x="566928" y="1207008"/>
-            <a:ext cx="2926080" cy="38100"/>
-          </a:xfrm>
-          <a:prstGeom prst="rect">
-            <a:avLst/>
-          </a:prstGeom>
-          <a:solidFill>
-            <a:srgbClr val="C9A227"/>
-          </a:solidFill>
-          <a:ln>
-            <a:noFill/>
-          </a:ln>
-          <a:effectLst/>
-        </p:spPr>
-        <p:style>
-          <a:lnRef idx="1">
-            <a:schemeClr val="accent1"/>
-          </a:lnRef>
-          <a:fillRef idx="3">
-            <a:schemeClr val="accent1"/>
-          </a:fillRef>
-          <a:effectRef idx="2">
-            <a:schemeClr val="accent1"/>
-          </a:effectRef>
-          <a:fontRef idx="minor">
-            <a:schemeClr val="lt1"/>
-          </a:fontRef>
-        </p:style>
-        <p:txBody>
-          <a:bodyPr rtlCol="0" anchor="ctr"/>
-          <a:lstStyle/>
-          <a:p>
-            <a:pPr algn="ctr"/>
-          </a:p>
-        </p:txBody>
-      </p:sp>
-      <p:sp>
-        <p:nvSpPr>
-          <p:cNvPr id="4" name="TextBox 3"/>
-          <p:cNvSpPr txBox="1"/>
-          <p:nvPr/>
-        </p:nvSpPr>
-        <p:spPr>
-          <a:xfrm>
-            <a:off x="640080" y="1600200"/>
-            <a:ext cx="10972800" cy="4251960"/>
-          </a:xfrm>
-          <a:prstGeom prst="rect">
-            <a:avLst/>
-          </a:prstGeom>
-          <a:noFill/>
-        </p:spPr>
-        <p:txBody>
-          <a:bodyPr wrap="square" anchor="t">
-            <a:spAutoFit/>
-          </a:bodyPr>
-          <a:lstStyle/>
-          <a:p>
-            <a:pPr algn="l">
-              <a:spcBef>
-                <a:spcPts val="0"/>
-              </a:spcBef>
-              <a:spcAft>
-                <a:spcPts val="1200"/>
-              </a:spcAft>
-            </a:pPr>
-            <a:r>
-              <a:rPr sz="1700" b="0">
-                <a:solidFill>
-                  <a:srgbClr val="0B2545"/>
-                </a:solidFill>
-                <a:latin typeface="Segoe UI"/>
-              </a:rPr>
-              <a:t>•  Push to main → Render auto-builds and deploys.</a:t>
-            </a:r>
-          </a:p>
-          <a:p>
-            <a:pPr algn="l">
-              <a:spcBef>
-                <a:spcPts val="0"/>
-              </a:spcBef>
-              <a:spcAft>
-                <a:spcPts val="1200"/>
-              </a:spcAft>
-            </a:pPr>
-            <a:r>
-              <a:rPr sz="1700" b="0">
-                <a:solidFill>
-                  <a:srgbClr val="1C2B3A"/>
-                </a:solidFill>
-                <a:latin typeface="Segoe UI"/>
-              </a:rPr>
-              <a:t>•  DB re-seeds on boot, so bundled-data changes go live automatically.</a:t>
-            </a:r>
-          </a:p>
-          <a:p>
-            <a:pPr algn="l">
-              <a:spcBef>
-                <a:spcPts val="0"/>
-              </a:spcBef>
-              <a:spcAft>
-                <a:spcPts val="1200"/>
-              </a:spcAft>
-            </a:pPr>
-            <a:r>
-              <a:rPr sz="1700" b="0">
-                <a:solidFill>
-                  <a:srgbClr val="1C2B3A"/>
-                </a:solidFill>
-                <a:latin typeface="Segoe UI"/>
-              </a:rPr>
-              <a:t>•  In-app authoring edits are lost on redeploy (ephemeral disk).</a:t>
-            </a:r>
-          </a:p>
-          <a:p>
-            <a:pPr algn="l">
-              <a:spcBef>
-                <a:spcPts val="0"/>
-              </a:spcBef>
-              <a:spcAft>
-                <a:spcPts val="1200"/>
-              </a:spcAft>
-            </a:pPr>
-            <a:r>
-              <a:rPr sz="1700" b="0">
-                <a:solidFill>
-                  <a:srgbClr val="1C2B3A"/>
-                </a:solidFill>
-                <a:latin typeface="Segoe UI"/>
-              </a:rPr>
-              <a:t>•  Rollback: redeploy a previous good build in the Render dashboard.</a:t>
-            </a:r>
-          </a:p>
-        </p:txBody>
-      </p:sp>
-      <p:sp>
-        <p:nvSpPr>
-          <p:cNvPr id="5" name="TextBox 4"/>
-          <p:cNvSpPr txBox="1"/>
-          <p:nvPr/>
-        </p:nvSpPr>
-        <p:spPr>
-          <a:xfrm>
-            <a:off x="320040" y="6419088"/>
-            <a:ext cx="3657600" cy="365760"/>
-          </a:xfrm>
-          <a:prstGeom prst="rect">
-            <a:avLst/>
-          </a:prstGeom>
-          <a:noFill/>
-        </p:spPr>
-        <p:txBody>
-          <a:bodyPr wrap="square" anchor="t">
-            <a:spAutoFit/>
-          </a:bodyPr>
-          <a:lstStyle/>
-          <a:p>
-            <a:pPr algn="l">
-              <a:spcBef>
-                <a:spcPts val="0"/>
-              </a:spcBef>
-              <a:spcAft>
-                <a:spcPts val="600"/>
-              </a:spcAft>
-            </a:pPr>
-            <a:r>
-              <a:rPr sz="900" b="1">
-                <a:solidFill>
-                  <a:srgbClr val="A8841C"/>
-                </a:solidFill>
-                <a:latin typeface="Segoe UI"/>
-              </a:rPr>
-              <a:t>OFFICIAL-SENSITIVE</a:t>
-            </a:r>
-          </a:p>
-        </p:txBody>
-      </p:sp>
-      <p:sp>
-        <p:nvSpPr>
-          <p:cNvPr id="6" name="TextBox 5"/>
-          <p:cNvSpPr txBox="1"/>
-          <p:nvPr/>
-        </p:nvSpPr>
-        <p:spPr>
-          <a:xfrm>
-            <a:off x="10789920" y="6419088"/>
-            <a:ext cx="1097280" cy="365760"/>
-          </a:xfrm>
-          <a:prstGeom prst="rect">
-            <a:avLst/>
-          </a:prstGeom>
-          <a:noFill/>
-        </p:spPr>
-        <p:txBody>
-          <a:bodyPr wrap="square" anchor="t">
-            <a:spAutoFit/>
-          </a:bodyPr>
-          <a:lstStyle/>
-          <a:p>
-            <a:pPr algn="r">
-              <a:spcBef>
-                <a:spcPts val="0"/>
-              </a:spcBef>
-              <a:spcAft>
-                <a:spcPts val="600"/>
-              </a:spcAft>
-            </a:pPr>
-            <a:r>
-              <a:rPr sz="900" b="0">
-                <a:solidFill>
-                  <a:srgbClr val="5B6675"/>
-                </a:solidFill>
-                <a:latin typeface="Segoe UI"/>
-              </a:rPr>
-              <a:t>DOC-03  ·  6</a:t>
-            </a:r>
-          </a:p>
-        </p:txBody>
-      </p:sp>
-    </p:spTree>
-  </p:cSld>
-  <p:clrMapOvr>
-    <a:masterClrMapping/>
-  </p:clrMapOvr>
-</p:sld>
-</file>
-
-<file path=ppt/slides/slide7.xml><?xml version="1.0" encoding="utf-8"?>
-<p:sld xmlns:a="http://schemas.openxmlformats.org/drawingml/2006/main" xmlns:p="http://schemas.openxmlformats.org/presentationml/2006/main" xmlns:r="http://schemas.openxmlformats.org/officeDocument/2006/relationships">
-  <p:cSld>
-    <p:spTree>
-      <p:nvGrpSpPr>
-        <p:cNvPr id="1" name=""/>
-        <p:cNvGrpSpPr/>
-        <p:nvPr/>
-      </p:nvGrpSpPr>
-      <p:grpSpPr/>
-      <p:sp>
-        <p:nvSpPr>
-          <p:cNvPr id="2" name="TextBox 1"/>
-          <p:cNvSpPr txBox="1"/>
-          <p:nvPr/>
-        </p:nvSpPr>
-        <p:spPr>
-          <a:xfrm>
-            <a:off x="548640" y="411480"/>
-            <a:ext cx="10972800" cy="914400"/>
-          </a:xfrm>
-          <a:prstGeom prst="rect">
-            <a:avLst/>
-          </a:prstGeom>
-          <a:noFill/>
-        </p:spPr>
-        <p:txBody>
-          <a:bodyPr wrap="square" anchor="t">
-            <a:spAutoFit/>
-          </a:bodyPr>
-          <a:lstStyle/>
-          <a:p>
-            <a:pPr algn="l">
-              <a:spcBef>
-                <a:spcPts val="0"/>
-              </a:spcBef>
-              <a:spcAft>
-                <a:spcPts val="600"/>
-              </a:spcAft>
-            </a:pPr>
-            <a:r>
-              <a:rPr sz="2600" b="1">
-                <a:solidFill>
-                  <a:srgbClr val="0B2545"/>
-                </a:solidFill>
-                <a:latin typeface="Segoe UI Semibold"/>
-              </a:rPr>
-              <a:t>Custom domain &amp; DNS</a:t>
-            </a:r>
-          </a:p>
-        </p:txBody>
-      </p:sp>
-      <p:sp>
-        <p:nvSpPr>
-          <p:cNvPr id="3" name="Rectangle 2"/>
-          <p:cNvSpPr/>
-          <p:nvPr/>
-        </p:nvSpPr>
-        <p:spPr>
-          <a:xfrm>
-            <a:off x="566928" y="1207008"/>
-            <a:ext cx="2926080" cy="38100"/>
-          </a:xfrm>
-          <a:prstGeom prst="rect">
-            <a:avLst/>
-          </a:prstGeom>
-          <a:solidFill>
-            <a:srgbClr val="C9A227"/>
-          </a:solidFill>
-          <a:ln>
-            <a:noFill/>
-          </a:ln>
-          <a:effectLst/>
-        </p:spPr>
-        <p:style>
-          <a:lnRef idx="1">
-            <a:schemeClr val="accent1"/>
-          </a:lnRef>
-          <a:fillRef idx="3">
-            <a:schemeClr val="accent1"/>
-          </a:fillRef>
-          <a:effectRef idx="2">
-            <a:schemeClr val="accent1"/>
-          </a:effectRef>
-          <a:fontRef idx="minor">
-            <a:schemeClr val="lt1"/>
-          </a:fontRef>
-        </p:style>
-        <p:txBody>
-          <a:bodyPr rtlCol="0" anchor="ctr"/>
-          <a:lstStyle/>
-          <a:p>
-            <a:pPr algn="ctr"/>
-          </a:p>
-        </p:txBody>
-      </p:sp>
-      <p:sp>
-        <p:nvSpPr>
-          <p:cNvPr id="4" name="TextBox 3"/>
-          <p:cNvSpPr txBox="1"/>
-          <p:nvPr/>
-        </p:nvSpPr>
-        <p:spPr>
-          <a:xfrm>
-            <a:off x="566928" y="1554480"/>
-            <a:ext cx="11064240" cy="548640"/>
-          </a:xfrm>
-          <a:prstGeom prst="rect">
-            <a:avLst/>
-          </a:prstGeom>
-          <a:noFill/>
-        </p:spPr>
-        <p:txBody>
-          <a:bodyPr wrap="square" anchor="t">
-            <a:spAutoFit/>
-          </a:bodyPr>
-          <a:lstStyle/>
-          <a:p>
-            <a:pPr algn="l">
-              <a:spcBef>
-                <a:spcPts val="0"/>
-              </a:spcBef>
-              <a:spcAft>
-                <a:spcPts val="600"/>
-              </a:spcAft>
-            </a:pPr>
-            <a:r>
-              <a:rPr sz="1400" b="0">
-                <a:solidFill>
-                  <a:srgbClr val="5B6675"/>
-                </a:solidFill>
-                <a:latin typeface="Segoe UI"/>
-              </a:rPr>
-              <a:t>Add this at the p3mai.com DNS provider; Render then issues TLS.</a:t>
-            </a:r>
-          </a:p>
-        </p:txBody>
-      </p:sp>
-      <p:graphicFrame>
-        <p:nvGraphicFramePr>
-          <p:cNvPr id="5" name="Table 4"/>
-          <p:cNvGraphicFramePr>
-            <a:graphicFrameLocks noGrp="1"/>
-          </p:cNvGraphicFramePr>
-          <p:nvPr/>
-        </p:nvGraphicFramePr>
-        <p:xfrm>
-          <a:off x="566928" y="2103120"/>
-          <a:ext cx="11064240" cy="914400"/>
-        </p:xfrm>
-        <a:graphic>
-          <a:graphicData uri="http://schemas.openxmlformats.org/drawingml/2006/table">
-            <a:tbl>
-              <a:tblPr firstRow="1" bandRow="1">
-                <a:tableStyleId>{5C22544A-7EE6-4342-B048-85BDC9FD1C3A}</a:tableStyleId>
-              </a:tblPr>
-              <a:tblGrid>
-                <a:gridCol w="2194560"/>
-                <a:gridCol w="2743200"/>
-                <a:gridCol w="6126480"/>
-              </a:tblGrid>
-              <a:tr h="457200">
-                <a:tc>
-                  <a:txBody>
-                    <a:bodyPr wrap="square"/>
-                    <a:lstStyle/>
-                    <a:p>
-                      <a:r>
-                        <a:rPr b="1" sz="1200">
-                          <a:solidFill>
-                            <a:srgbClr val="FFFFFF"/>
-                          </a:solidFill>
-                          <a:latin typeface="Segoe UI Semibold"/>
-                        </a:rPr>
-                        <a:t>Type</a:t>
-                      </a:r>
-                    </a:p>
-                  </a:txBody>
-                  <a:tcPr>
-                    <a:solidFill>
-                      <a:srgbClr val="0B2545"/>
-                    </a:solidFill>
-                  </a:tcPr>
-                </a:tc>
-                <a:tc>
-                  <a:txBody>
-                    <a:bodyPr wrap="square"/>
-                    <a:lstStyle/>
-                    <a:p>
-                      <a:r>
-                        <a:rPr b="1" sz="1200">
-                          <a:solidFill>
-                            <a:srgbClr val="FFFFFF"/>
-                          </a:solidFill>
-                          <a:latin typeface="Segoe UI Semibold"/>
-                        </a:rPr>
-                        <a:t>Host</a:t>
-                      </a:r>
-                    </a:p>
-                  </a:txBody>
-                  <a:tcPr>
-                    <a:solidFill>
-                      <a:srgbClr val="0B2545"/>
-                    </a:solidFill>
-                  </a:tcPr>
-                </a:tc>
-                <a:tc>
-                  <a:txBody>
-                    <a:bodyPr wrap="square"/>
-                    <a:lstStyle/>
-                    <a:p>
-                      <a:r>
-                        <a:rPr b="1" sz="1200">
-                          <a:solidFill>
-                            <a:srgbClr val="FFFFFF"/>
-                          </a:solidFill>
-                          <a:latin typeface="Segoe UI Semibold"/>
-                        </a:rPr>
-                        <a:t>Value</a:t>
-                      </a:r>
-                    </a:p>
-                  </a:txBody>
-                  <a:tcPr>
-                    <a:solidFill>
-                      <a:srgbClr val="0B2545"/>
                     </a:solidFill>
                   </a:tcPr>
                 </a:tc>
@@ -5647,7 +5827,7 @@
                           </a:solidFill>
                           <a:latin typeface="Segoe UI"/>
                         </a:rPr>
-                        <a:t>CNAME</a:t>
+                        <a:t>/safe</a:t>
                       </a:r>
                     </a:p>
                   </a:txBody>
@@ -5669,29 +5849,7 @@
                           </a:solidFill>
                           <a:latin typeface="Segoe UI"/>
                         </a:rPr>
-                        <a:t>prince2</a:t>
-                      </a:r>
-                    </a:p>
-                  </a:txBody>
-                  <a:tcPr>
-                    <a:solidFill>
-                      <a:srgbClr val="FFFFFF"/>
-                    </a:solidFill>
-                  </a:tcPr>
-                </a:tc>
-                <a:tc>
-                  <a:txBody>
-                    <a:bodyPr wrap="square"/>
-                    <a:lstStyle/>
-                    <a:p>
-                      <a:r>
-                        <a:rPr sz="1100">
-                          <a:solidFill>
-                            <a:srgbClr val="1C2B3A"/>
-                          </a:solidFill>
-                          <a:latin typeface="Segoe UI"/>
-                        </a:rPr>
-                        <a:t>method-map.onrender.com</a:t>
+                        <a:t>safe-method-map.onrender.com</a:t>
                       </a:r>
                     </a:p>
                   </a:txBody>

--- a/docs/03_Operation_Manual_Summary.pptx
+++ b/docs/03_Operation_Manual_Summary.pptx
@@ -3920,7 +3920,7 @@
                           </a:solidFill>
                           <a:latin typeface="Segoe UI"/>
                         </a:rPr>
-                        <a:t>method-map · msp-method-map · safe-method-map</a:t>
+                        <a:t>method-map · msp- · safe- · pmbok-method-map</a:t>
                       </a:r>
                     </a:p>
                   </a:txBody>
@@ -3966,7 +3966,7 @@
                           </a:solidFill>
                           <a:latin typeface="Segoe UI"/>
                         </a:rPr>
-                        <a:t>apps.p3mai.com/prince2 · /msp · /safe</a:t>
+                        <a:t>apps.p3mai.com/prince2 · /msp · /safe · /pmbok</a:t>
                       </a:r>
                     </a:p>
                   </a:txBody>
@@ -5664,7 +5664,7 @@
         </p:nvGraphicFramePr>
         <p:xfrm>
           <a:off x="566928" y="2103120"/>
-          <a:ext cx="8503920" cy="1828800"/>
+          <a:ext cx="8503920" cy="2286000"/>
         </p:xfrm>
         <a:graphic>
           <a:graphicData uri="http://schemas.openxmlformats.org/drawingml/2006/table">
@@ -5856,6 +5856,52 @@
                   <a:tcPr>
                     <a:solidFill>
                       <a:srgbClr val="FFFFFF"/>
+                    </a:solidFill>
+                  </a:tcPr>
+                </a:tc>
+              </a:tr>
+              <a:tr h="457200">
+                <a:tc>
+                  <a:txBody>
+                    <a:bodyPr wrap="square"/>
+                    <a:lstStyle/>
+                    <a:p>
+                      <a:r>
+                        <a:rPr sz="1100">
+                          <a:solidFill>
+                            <a:srgbClr val="1C2B3A"/>
+                          </a:solidFill>
+                          <a:latin typeface="Segoe UI"/>
+                        </a:rPr>
+                        <a:t>/pmbok</a:t>
+                      </a:r>
+                    </a:p>
+                  </a:txBody>
+                  <a:tcPr>
+                    <a:solidFill>
+                      <a:srgbClr val="F6F7F9"/>
+                    </a:solidFill>
+                  </a:tcPr>
+                </a:tc>
+                <a:tc>
+                  <a:txBody>
+                    <a:bodyPr wrap="square"/>
+                    <a:lstStyle/>
+                    <a:p>
+                      <a:r>
+                        <a:rPr sz="1100">
+                          <a:solidFill>
+                            <a:srgbClr val="1C2B3A"/>
+                          </a:solidFill>
+                          <a:latin typeface="Segoe UI"/>
+                        </a:rPr>
+                        <a:t>pmbok-method-map.onrender.com</a:t>
+                      </a:r>
+                    </a:p>
+                  </a:txBody>
+                  <a:tcPr>
+                    <a:solidFill>
+                      <a:srgbClr val="F6F7F9"/>
                     </a:solidFill>
                   </a:tcPr>
                 </a:tc>

--- a/docs/03_Operation_Manual_Summary.pptx
+++ b/docs/03_Operation_Manual_Summary.pptx
@@ -4456,7 +4456,7 @@
                           </a:solidFill>
                           <a:latin typeface="Segoe UI"/>
                         </a:rPr>
-                        <a:t>Unlocks authoring — CHANGE for production; per-service</a:t>
+                        <a:t>Fail-closed: no default; unset = read-only; distinct secret per service</a:t>
                       </a:r>
                     </a:p>
                   </a:txBody>
